--- a/tests/report_generator/integration/templates/portfolio-metrics.pptx
+++ b/tests/report_generator/integration/templates/portfolio-metrics.pptx
@@ -17496,7 +17496,7 @@
                   <a:schemeClr val="bg1"/>
                 </a:solidFill>
               </a:rPr>
-              <a:t>PORTFOLIO_PERIOD_MAINT_UNIT_INTERFACING_CHANGE_GROUPED_BY_TEAM</a:t>
+              <a:t>PORTFOLIO_PERIOD_MAINT_UNIT_INTERFACING_CHANGE</a:t>
             </a:r>
           </a:p>
         </p:txBody>
@@ -17915,7 +17915,7 @@
                   <a:schemeClr val="tx2"/>
                 </a:solidFill>
               </a:rPr>
-              <a:t>Team</a:t>
+              <a:t>GROUPED_BY_LABEL</a:t>
             </a:r>
           </a:p>
         </p:txBody>
@@ -18203,7 +18203,7 @@
                   <a:schemeClr val="bg1"/>
                 </a:solidFill>
               </a:rPr>
-              <a:t>PORTFOLIO_PERIOD_MAINT_MODULE_COUPLING_GROUPED_BY_TEAM</a:t>
+              <a:t>PORTFOLIO_PERIOD_MAINT_MODULE_COUPLING</a:t>
             </a:r>
           </a:p>
         </p:txBody>
@@ -18807,7 +18807,7 @@
                   <a:schemeClr val="tx2"/>
                 </a:solidFill>
               </a:rPr>
-              <a:t>Team</a:t>
+              <a:t>GROUPED_BY_LABEL</a:t>
             </a:r>
           </a:p>
         </p:txBody>
@@ -19159,7 +19159,7 @@
                   <a:schemeClr val="bg1"/>
                 </a:solidFill>
               </a:rPr>
-              <a:t>PORTFOLIO_PERIOD_MAINT_MODULE_COUPLING_CHANGE_GROUPED_BY_TEAM</a:t>
+              <a:t>PORTFOLIO_PERIOD_MAINT_MODULE_COUPLING_CHANGE</a:t>
             </a:r>
           </a:p>
         </p:txBody>
@@ -19578,7 +19578,7 @@
                   <a:schemeClr val="tx2"/>
                 </a:solidFill>
               </a:rPr>
-              <a:t>Team</a:t>
+              <a:t>GROUPED_BY_LABEL</a:t>
             </a:r>
           </a:p>
         </p:txBody>
@@ -19866,7 +19866,7 @@
                   <a:schemeClr val="bg1"/>
                 </a:solidFill>
               </a:rPr>
-              <a:t>PORTFOLIO_PERIOD_MAINT_COMPONENT_INDEPENDENCE_GROUPED_BY_TEAM</a:t>
+              <a:t>PORTFOLIO_PERIOD_MAINT_COMPONENT_INDEPENDENCE</a:t>
             </a:r>
           </a:p>
         </p:txBody>
@@ -20470,7 +20470,7 @@
                   <a:schemeClr val="tx2"/>
                 </a:solidFill>
               </a:rPr>
-              <a:t>Team</a:t>
+              <a:t>GROUPED_BY_LABEL</a:t>
             </a:r>
           </a:p>
         </p:txBody>
@@ -20822,7 +20822,7 @@
                   <a:schemeClr val="bg1"/>
                 </a:solidFill>
               </a:rPr>
-              <a:t>PORTFOLIO_PERIOD_MAINT_COMPONENT_INDEPENDENCE_CHANGE_GROUPED_BY_TEAM</a:t>
+              <a:t>PORTFOLIO_PERIOD_MAINT_COMPONENT_INDEPENDENCE_CHANGE</a:t>
             </a:r>
           </a:p>
         </p:txBody>
@@ -21241,7 +21241,7 @@
                   <a:schemeClr val="tx2"/>
                 </a:solidFill>
               </a:rPr>
-              <a:t>Team</a:t>
+              <a:t>GROUPED_BY_LABEL</a:t>
             </a:r>
           </a:p>
         </p:txBody>
@@ -21529,7 +21529,7 @@
                   <a:schemeClr val="bg1"/>
                 </a:solidFill>
               </a:rPr>
-              <a:t>PORTFOLIO_PERIOD_MAINT_COMPONENT_ENTANGLEMENT_GROUPED_BY_TEAM</a:t>
+              <a:t>PORTFOLIO_PERIOD_MAINT_COMPONENT_ENTANGLEMENT</a:t>
             </a:r>
           </a:p>
         </p:txBody>
@@ -22133,7 +22133,7 @@
                   <a:schemeClr val="tx2"/>
                 </a:solidFill>
               </a:rPr>
-              <a:t>Team</a:t>
+              <a:t>GROUPED_BY_LABEL</a:t>
             </a:r>
           </a:p>
         </p:txBody>
@@ -22485,7 +22485,7 @@
                   <a:schemeClr val="bg1"/>
                 </a:solidFill>
               </a:rPr>
-              <a:t>PORTFOLIO_PERIOD_MAINT_COMPONENT_ENTANGLEMENT_CHANGE_GROUPED_BY_TEAM</a:t>
+              <a:t>PORTFOLIO_PERIOD_MAINT_COMPONENT_ENTANGLEMENT_CHANGE</a:t>
             </a:r>
           </a:p>
         </p:txBody>
@@ -22904,7 +22904,7 @@
                   <a:schemeClr val="tx2"/>
                 </a:solidFill>
               </a:rPr>
-              <a:t>Team</a:t>
+              <a:t>GROUPED_BY_LABEL</a:t>
             </a:r>
           </a:p>
         </p:txBody>
@@ -23460,7 +23460,7 @@
                   <a:schemeClr val="bg1"/>
                 </a:solidFill>
               </a:rPr>
-              <a:t>PORTFOLIO_PERIOD_ARCH_CODE_BREAKDOWN_GROUPED_BY_TEAM</a:t>
+              <a:t>PORTFOLIO_PERIOD_ARCH_CODE_BREAKDOWN</a:t>
             </a:r>
           </a:p>
         </p:txBody>
@@ -24064,7 +24064,7 @@
                   <a:schemeClr val="tx2"/>
                 </a:solidFill>
               </a:rPr>
-              <a:t>Team</a:t>
+              <a:t>GROUPED_BY_LABEL</a:t>
             </a:r>
           </a:p>
         </p:txBody>
@@ -24416,7 +24416,7 @@
                   <a:schemeClr val="bg1"/>
                 </a:solidFill>
               </a:rPr>
-              <a:t>PORTFOLIO_PERIOD_ARCH_CODE_BREAKDOWN_RATINGS_CHANGE_GROUPED_BY_TEAM</a:t>
+              <a:t>PORTFOLIO_PERIOD_ARCH_CODE_BREAKDOWN_RATINGS_CHANGE</a:t>
             </a:r>
           </a:p>
         </p:txBody>
@@ -24835,7 +24835,7 @@
                   <a:schemeClr val="tx2"/>
                 </a:solidFill>
               </a:rPr>
-              <a:t>Team</a:t>
+              <a:t>GROUPED_BY_LABEL</a:t>
             </a:r>
           </a:p>
         </p:txBody>
@@ -25385,7 +25385,7 @@
                   <a:schemeClr val="bg1"/>
                 </a:solidFill>
               </a:rPr>
-              <a:t>PORTFOLIO_PERIOD_ARCH_COMPONENT_COUPLING_GROUPED_BY_TEAM</a:t>
+              <a:t>PORTFOLIO_PERIOD_ARCH_COMPONENT_COUPLING</a:t>
             </a:r>
           </a:p>
         </p:txBody>
@@ -25989,7 +25989,7 @@
                   <a:schemeClr val="tx2"/>
                 </a:solidFill>
               </a:rPr>
-              <a:t>Team</a:t>
+              <a:t>GROUPED_BY_LABEL</a:t>
             </a:r>
           </a:p>
         </p:txBody>
@@ -26341,7 +26341,7 @@
                   <a:schemeClr val="bg1"/>
                 </a:solidFill>
               </a:rPr>
-              <a:t>PORTFOLIO_PERIOD_ARCH_COMPONENT_COUPLING_RATINGS_CHANGE_GROUPED_BY_TEAM</a:t>
+              <a:t>PORTFOLIO_PERIOD_ARCH_COMPONENT_COUPLING_RATINGS_CHANGE</a:t>
             </a:r>
           </a:p>
         </p:txBody>
@@ -26760,7 +26760,7 @@
                   <a:schemeClr val="tx2"/>
                 </a:solidFill>
               </a:rPr>
-              <a:t>Team</a:t>
+              <a:t>GROUPED_BY_LABEL</a:t>
             </a:r>
           </a:p>
         </p:txBody>
@@ -27048,7 +27048,7 @@
                   <a:schemeClr val="bg1"/>
                 </a:solidFill>
               </a:rPr>
-              <a:t>PORTFOLIO_PERIOD_ARCH_COMPONENT_ADJACENCY_GROUPED_BY_TEAM</a:t>
+              <a:t>PORTFOLIO_PERIOD_ARCH_COMPONENT_ADJACENCY</a:t>
             </a:r>
           </a:p>
         </p:txBody>
@@ -27652,7 +27652,7 @@
                   <a:schemeClr val="tx2"/>
                 </a:solidFill>
               </a:rPr>
-              <a:t>Team</a:t>
+              <a:t>GROUPED_BY_LABEL</a:t>
             </a:r>
           </a:p>
         </p:txBody>
@@ -28004,7 +28004,7 @@
                   <a:schemeClr val="bg1"/>
                 </a:solidFill>
               </a:rPr>
-              <a:t>PORTFOLIO_PERIOD_ARCH_COMPONENT_ADJACENCY_RATINGS_CHANGE_GROUPED_BY_TEAM</a:t>
+              <a:t>PORTFOLIO_PERIOD_ARCH_COMPONENT_ADJACENCY_RATINGS_CHANGE</a:t>
             </a:r>
           </a:p>
         </p:txBody>
@@ -28423,7 +28423,7 @@
                   <a:schemeClr val="tx2"/>
                 </a:solidFill>
               </a:rPr>
-              <a:t>Team</a:t>
+              <a:t>GROUPED_BY_LABEL</a:t>
             </a:r>
           </a:p>
         </p:txBody>
@@ -28711,7 +28711,7 @@
                   <a:schemeClr val="bg1"/>
                 </a:solidFill>
               </a:rPr>
-              <a:t>PORTFOLIO_PERIOD_ARCH_COMPONENT_COHESION_GROUPED_BY_TEAM</a:t>
+              <a:t>PORTFOLIO_PERIOD_ARCH_COMPONENT_COHESION</a:t>
             </a:r>
           </a:p>
         </p:txBody>
@@ -29315,7 +29315,7 @@
                   <a:schemeClr val="tx2"/>
                 </a:solidFill>
               </a:rPr>
-              <a:t>Team</a:t>
+              <a:t>GROUPED_BY_LABEL</a:t>
             </a:r>
           </a:p>
         </p:txBody>
@@ -29667,7 +29667,7 @@
                   <a:schemeClr val="bg1"/>
                 </a:solidFill>
               </a:rPr>
-              <a:t>PORTFOLIO_PERIOD_ARCH_COMPONENT_COHESION_RATINGS_CHANGE_GROUPED_BY_TEAM</a:t>
+              <a:t>PORTFOLIO_PERIOD_ARCH_COMPONENT_COHESION_RATINGS_CHANGE</a:t>
             </a:r>
           </a:p>
         </p:txBody>
@@ -30086,7 +30086,7 @@
                   <a:schemeClr val="tx2"/>
                 </a:solidFill>
               </a:rPr>
-              <a:t>Team</a:t>
+              <a:t>GROUPED_BY_LABEL</a:t>
             </a:r>
           </a:p>
         </p:txBody>
@@ -30400,7 +30400,7 @@
                   <a:schemeClr val="bg1"/>
                 </a:solidFill>
               </a:rPr>
-              <a:t>_GROUPED_BY_TEAM</a:t>
+              <a:t/>
             </a:r>
           </a:p>
         </p:txBody>
@@ -31004,7 +31004,7 @@
                   <a:schemeClr val="tx2"/>
                 </a:solidFill>
               </a:rPr>
-              <a:t>Team</a:t>
+              <a:t>GROUPED_BY_LABEL</a:t>
             </a:r>
           </a:p>
         </p:txBody>
@@ -31391,7 +31391,7 @@
                   <a:schemeClr val="bg1"/>
                 </a:solidFill>
               </a:rPr>
-              <a:t>PORTFOLIO_PERIOD_ARCH_COMMUNICATION_CENTRALIZATION_RATINGS_CHANGE_GROUPED_BY_TEAM</a:t>
+              <a:t>PORTFOLIO_PERIOD_ARCH_COMMUNICATION_CENTRALIZATION_RATINGS_CHANGE</a:t>
             </a:r>
           </a:p>
         </p:txBody>
@@ -31810,7 +31810,7 @@
                   <a:schemeClr val="tx2"/>
                 </a:solidFill>
               </a:rPr>
-              <a:t>Team</a:t>
+              <a:t>GROUPED_BY_LABEL</a:t>
             </a:r>
           </a:p>
         </p:txBody>
@@ -32098,7 +32098,7 @@
                   <a:schemeClr val="bg1"/>
                 </a:solidFill>
               </a:rPr>
-              <a:t>PORTFOLIO_PERIOD_ARCH_DATA_COUPLING_GROUPED_BY_TEAM</a:t>
+              <a:t>PORTFOLIO_PERIOD_ARCH_DATA_COUPLING</a:t>
             </a:r>
           </a:p>
         </p:txBody>
@@ -32702,7 +32702,7 @@
                   <a:schemeClr val="tx2"/>
                 </a:solidFill>
               </a:rPr>
-              <a:t>Team</a:t>
+              <a:t>GROUPED_BY_LABEL</a:t>
             </a:r>
           </a:p>
         </p:txBody>
@@ -33054,7 +33054,7 @@
                   <a:schemeClr val="bg1"/>
                 </a:solidFill>
               </a:rPr>
-              <a:t>PORTFOLIO_PERIOD_ARCH_DATA_COUPLING_RATINGS_CHANGE_GROUPED_BY_TEAM</a:t>
+              <a:t>PORTFOLIO_PERIOD_ARCH_DATA_COUPLING_RATINGS_CHANGE</a:t>
             </a:r>
           </a:p>
         </p:txBody>
@@ -33473,7 +33473,7 @@
                   <a:schemeClr val="tx2"/>
                 </a:solidFill>
               </a:rPr>
-              <a:t>Team</a:t>
+              <a:t>GROUPED_BY_LABEL</a:t>
             </a:r>
           </a:p>
         </p:txBody>
@@ -33680,7 +33680,7 @@
                   <a:schemeClr val="bg1"/>
                 </a:solidFill>
               </a:rPr>
-              <a:t>PORTFOLIO_PERIOD_MAINT_DUPLICATION_GROUPED_BY_TEAM</a:t>
+              <a:t>PORTFOLIO_PERIOD_MAINT_DUPLICATION</a:t>
             </a:r>
           </a:p>
         </p:txBody>
@@ -34284,7 +34284,7 @@
                   <a:schemeClr val="tx2"/>
                 </a:solidFill>
               </a:rPr>
-              <a:t>Team</a:t>
+              <a:t>GROUPED_BY_LABEL</a:t>
             </a:r>
           </a:p>
         </p:txBody>
@@ -34636,7 +34636,7 @@
                   <a:schemeClr val="bg1"/>
                 </a:solidFill>
               </a:rPr>
-              <a:t>PORTFOLIO_PERIOD_ARCH_BOUNDED_EVOLUTION_GROUPED_BY_TEAM</a:t>
+              <a:t>PORTFOLIO_PERIOD_ARCH_BOUNDED_EVOLUTION</a:t>
             </a:r>
           </a:p>
         </p:txBody>
@@ -35240,7 +35240,7 @@
                   <a:schemeClr val="tx2"/>
                 </a:solidFill>
               </a:rPr>
-              <a:t>Team</a:t>
+              <a:t>GROUPED_BY_LABEL</a:t>
             </a:r>
           </a:p>
         </p:txBody>
@@ -35592,7 +35592,7 @@
                   <a:schemeClr val="bg1"/>
                 </a:solidFill>
               </a:rPr>
-              <a:t>PORTFOLIO_PERIOD_ARCH_BOUNDED_EVOLUTION_RATINGS_CHANGE_GROUPED_BY_TEAM</a:t>
+              <a:t>PORTFOLIO_PERIOD_ARCH_BOUNDED_EVOLUTION_RATINGS_CHANGE</a:t>
             </a:r>
           </a:p>
         </p:txBody>
@@ -36011,7 +36011,7 @@
                   <a:schemeClr val="tx2"/>
                 </a:solidFill>
               </a:rPr>
-              <a:t>Team</a:t>
+              <a:t>GROUPED_BY_LABEL</a:t>
             </a:r>
           </a:p>
         </p:txBody>
@@ -36299,7 +36299,7 @@
                   <a:schemeClr val="bg1"/>
                 </a:solidFill>
               </a:rPr>
-              <a:t>PORTFOLIO_PERIOD_ARCH_KNOWLEDGE_AWARENESS_GROUPED_BY_TEAM</a:t>
+              <a:t>PORTFOLIO_PERIOD_ARCH_KNOWLEDGE_AWARENESS</a:t>
             </a:r>
           </a:p>
         </p:txBody>
@@ -36903,7 +36903,7 @@
                   <a:schemeClr val="tx2"/>
                 </a:solidFill>
               </a:rPr>
-              <a:t>Team</a:t>
+              <a:t>GROUPED_BY_LABEL</a:t>
             </a:r>
           </a:p>
         </p:txBody>
@@ -37255,7 +37255,7 @@
                   <a:schemeClr val="bg1"/>
                 </a:solidFill>
               </a:rPr>
-              <a:t>PORTFOLIO_PERIOD_ARCH_KNOWLEDGE_AWARENESS_RATINGS_CHANGE_GROUPED_BY_TEAM</a:t>
+              <a:t>PORTFOLIO_PERIOD_ARCH_KNOWLEDGE_AWARENESS_RATINGS_CHANGE</a:t>
             </a:r>
           </a:p>
         </p:txBody>
@@ -37674,7 +37674,7 @@
                   <a:schemeClr val="tx2"/>
                 </a:solidFill>
               </a:rPr>
-              <a:t>Team</a:t>
+              <a:t>GROUPED_BY_LABEL</a:t>
             </a:r>
           </a:p>
         </p:txBody>
@@ -37962,7 +37962,7 @@
                   <a:schemeClr val="bg1"/>
                 </a:solidFill>
               </a:rPr>
-              <a:t>PORTFOLIO_PERIOD_ARCH_COMPONENT_FRESHNESS_GROUPED_BY_TEAM</a:t>
+              <a:t>PORTFOLIO_PERIOD_ARCH_COMPONENT_FRESHNESS</a:t>
             </a:r>
           </a:p>
         </p:txBody>
@@ -38566,7 +38566,7 @@
                   <a:schemeClr val="tx2"/>
                 </a:solidFill>
               </a:rPr>
-              <a:t>Team</a:t>
+              <a:t>GROUPED_BY_LABEL</a:t>
             </a:r>
           </a:p>
         </p:txBody>
@@ -38918,7 +38918,7 @@
                   <a:schemeClr val="bg1"/>
                 </a:solidFill>
               </a:rPr>
-              <a:t>PORTFOLIO_PERIOD_ARCH_COMPONENT_FRESHNESS_RATINGS_CHANGE_GROUPED_BY_TEAM</a:t>
+              <a:t>PORTFOLIO_PERIOD_ARCH_COMPONENT_FRESHNESS_RATINGS_CHANGE</a:t>
             </a:r>
           </a:p>
         </p:txBody>
@@ -39337,7 +39337,7 @@
                   <a:schemeClr val="tx2"/>
                 </a:solidFill>
               </a:rPr>
-              <a:t>Team</a:t>
+              <a:t>GROUPED_BY_LABEL</a:t>
             </a:r>
           </a:p>
         </p:txBody>
@@ -39625,7 +39625,7 @@
                   <a:schemeClr val="bg1"/>
                 </a:solidFill>
               </a:rPr>
-              <a:t>PORTFOLIO_PERIOD_ARCH_TEAM_STABILITY_GROUPED_BY_TEAM</a:t>
+              <a:t>PORTFOLIO_PERIOD_ARCH_TEAM_STABILITY</a:t>
             </a:r>
           </a:p>
         </p:txBody>
@@ -40229,7 +40229,7 @@
                   <a:schemeClr val="tx2"/>
                 </a:solidFill>
               </a:rPr>
-              <a:t>Team</a:t>
+              <a:t>GROUPED_BY_LABEL</a:t>
             </a:r>
           </a:p>
         </p:txBody>
@@ -40581,7 +40581,7 @@
                   <a:schemeClr val="bg1"/>
                 </a:solidFill>
               </a:rPr>
-              <a:t>PORTFOLIO_PERIOD_ARCH_TEAM_STABILITY_RATINGS_CHANGE_GROUPED_BY_TEAM</a:t>
+              <a:t>PORTFOLIO_PERIOD_ARCH_TEAM_STABILITY_RATINGS_CHANGE</a:t>
             </a:r>
           </a:p>
         </p:txBody>
@@ -41000,7 +41000,7 @@
                   <a:schemeClr val="tx2"/>
                 </a:solidFill>
               </a:rPr>
-              <a:t>Team</a:t>
+              <a:t>GROUPED_BY_LABEL</a:t>
             </a:r>
           </a:p>
         </p:txBody>
@@ -41556,7 +41556,7 @@
                   <a:schemeClr val="bg1"/>
                 </a:solidFill>
               </a:rPr>
-              <a:t>PORTFOLIO_PERIOD_OSH_VULNERABILITY_GROUPED_BY_TEAM</a:t>
+              <a:t>PORTFOLIO_PERIOD_OSH_VULNERABILITY</a:t>
             </a:r>
           </a:p>
         </p:txBody>
@@ -42160,7 +42160,7 @@
                   <a:schemeClr val="tx2"/>
                 </a:solidFill>
               </a:rPr>
-              <a:t>Team</a:t>
+              <a:t>GROUPED_BY_LABEL</a:t>
             </a:r>
           </a:p>
         </p:txBody>
@@ -42512,7 +42512,7 @@
                   <a:schemeClr val="bg1"/>
                 </a:solidFill>
               </a:rPr>
-              <a:t>PORTFOLIO_PERIOD_MAINT_DUPLICATION_CHANGE_GROUPED_BY_TEAM</a:t>
+              <a:t>PORTFOLIO_PERIOD_MAINT_DUPLICATION_CHANGE</a:t>
             </a:r>
           </a:p>
         </p:txBody>
@@ -42931,7 +42931,7 @@
                   <a:schemeClr val="tx2"/>
                 </a:solidFill>
               </a:rPr>
-              <a:t>Team</a:t>
+              <a:t>GROUPED_BY_LABEL</a:t>
             </a:r>
           </a:p>
         </p:txBody>
@@ -43219,7 +43219,7 @@
                   <a:schemeClr val="bg1"/>
                 </a:solidFill>
               </a:rPr>
-              <a:t>PORTFOLIO_PERIOD_OSH_LICENSES_GROUPED_BY_TEAM</a:t>
+              <a:t>PORTFOLIO_PERIOD_OSH_LICENSES</a:t>
             </a:r>
           </a:p>
         </p:txBody>
@@ -43823,7 +43823,7 @@
                   <a:schemeClr val="tx2"/>
                 </a:solidFill>
               </a:rPr>
-              <a:t>Team</a:t>
+              <a:t>GROUPED_BY_LABEL</a:t>
             </a:r>
           </a:p>
         </p:txBody>
@@ -44175,7 +44175,7 @@
                   <a:schemeClr val="bg1"/>
                 </a:solidFill>
               </a:rPr>
-              <a:t>PORTFOLIO_PERIOD_OSH_FRESHNESS_GROUPED_BY_TEAM</a:t>
+              <a:t>PORTFOLIO_PERIOD_OSH_FRESHNESS</a:t>
             </a:r>
           </a:p>
         </p:txBody>
@@ -44779,7 +44779,7 @@
                   <a:schemeClr val="tx2"/>
                 </a:solidFill>
               </a:rPr>
-              <a:t>Team</a:t>
+              <a:t>GROUPED_BY_LABEL</a:t>
             </a:r>
           </a:p>
         </p:txBody>
@@ -45131,7 +45131,7 @@
                   <a:schemeClr val="bg1"/>
                 </a:solidFill>
               </a:rPr>
-              <a:t>PORTFOLIO_PERIOD_OSH_MANAGEMENT_GROUPED_BY_TEAM</a:t>
+              <a:t>PORTFOLIO_PERIOD_OSH_MANAGEMENT</a:t>
             </a:r>
           </a:p>
         </p:txBody>
@@ -45735,7 +45735,7 @@
                   <a:schemeClr val="tx2"/>
                 </a:solidFill>
               </a:rPr>
-              <a:t>Team</a:t>
+              <a:t>GROUPED_BY_LABEL</a:t>
             </a:r>
           </a:p>
         </p:txBody>
@@ -46087,7 +46087,7 @@
                   <a:schemeClr val="bg1"/>
                 </a:solidFill>
               </a:rPr>
-              <a:t>PORTFOLIO_PERIOD_OSH_ACTIVITY_GROUPED_BY_TEAM</a:t>
+              <a:t>PORTFOLIO_PERIOD_OSH_ACTIVITY</a:t>
             </a:r>
           </a:p>
         </p:txBody>
@@ -46133,7 +46133,7 @@
                   <a:schemeClr val="tx2"/>
                 </a:solidFill>
               </a:rPr>
-              <a:t>Team</a:t>
+              <a:t>GROUPED_BY_LABEL</a:t>
             </a:r>
           </a:p>
         </p:txBody>
@@ -47139,7 +47139,7 @@
                   <a:schemeClr val="bg1"/>
                 </a:solidFill>
               </a:rPr>
-              <a:t>PORTFOLIO_PERIOD_MAINT_UNIT_SIZE_GROUPED_BY_TEAM</a:t>
+              <a:t>PORTFOLIO_PERIOD_MAINT_UNIT_SIZE</a:t>
             </a:r>
           </a:p>
         </p:txBody>
@@ -47743,7 +47743,7 @@
                   <a:schemeClr val="tx2"/>
                 </a:solidFill>
               </a:rPr>
-              <a:t>Team</a:t>
+              <a:t>GROUPED_BY_LABEL</a:t>
             </a:r>
           </a:p>
         </p:txBody>
@@ -48095,7 +48095,7 @@
                   <a:schemeClr val="bg1"/>
                 </a:solidFill>
               </a:rPr>
-              <a:t>PORTFOLIO_PERIOD_MAINT_UNIT_SIZE_CHANGE_GROUPED_BY_TEAM</a:t>
+              <a:t>PORTFOLIO_PERIOD_MAINT_UNIT_SIZE_CHANGE</a:t>
             </a:r>
           </a:p>
         </p:txBody>
@@ -48514,7 +48514,7 @@
                   <a:schemeClr val="tx2"/>
                 </a:solidFill>
               </a:rPr>
-              <a:t>Team</a:t>
+              <a:t>GROUPED_BY_LABEL</a:t>
             </a:r>
           </a:p>
         </p:txBody>
@@ -48802,7 +48802,7 @@
                   <a:schemeClr val="bg1"/>
                 </a:solidFill>
               </a:rPr>
-              <a:t>PORTFOLIO_PERIOD_MAINT_UNIT_COMPLEXITY_GROUPED_BY_TEAM</a:t>
+              <a:t>PORTFOLIO_PERIOD_MAINT_UNIT_COMPLEXITY</a:t>
             </a:r>
           </a:p>
         </p:txBody>
@@ -49406,7 +49406,7 @@
                   <a:schemeClr val="tx2"/>
                 </a:solidFill>
               </a:rPr>
-              <a:t>Team</a:t>
+              <a:t>GROUPED_BY_LABEL</a:t>
             </a:r>
           </a:p>
         </p:txBody>
@@ -49758,7 +49758,7 @@
                   <a:schemeClr val="bg1"/>
                 </a:solidFill>
               </a:rPr>
-              <a:t>PORTFOLIO_PERIOD_MAINT_UNIT_COMPLEXITY_CHANGE_GROUPED_BY_TEAM</a:t>
+              <a:t>PORTFOLIO_PERIOD_MAINT_UNIT_COMPLEXITY_CHANGE</a:t>
             </a:r>
           </a:p>
         </p:txBody>
@@ -50177,7 +50177,7 @@
                   <a:schemeClr val="tx2"/>
                 </a:solidFill>
               </a:rPr>
-              <a:t>Team</a:t>
+              <a:t>GROUPED_BY_LABEL</a:t>
             </a:r>
           </a:p>
         </p:txBody>
@@ -50465,7 +50465,7 @@
                   <a:schemeClr val="bg1"/>
                 </a:solidFill>
               </a:rPr>
-              <a:t>PORTFOLIO_PERIOD_MAINT_UNIT_INTERFACING_GROUPED_BY_TEAM</a:t>
+              <a:t>PORTFOLIO_PERIOD_MAINT_UNIT_INTERFACING</a:t>
             </a:r>
           </a:p>
         </p:txBody>
@@ -51069,7 +51069,7 @@
                   <a:schemeClr val="tx2"/>
                 </a:solidFill>
               </a:rPr>
-              <a:t>Team</a:t>
+              <a:t>GROUPED_BY_LABEL</a:t>
             </a:r>
           </a:p>
         </p:txBody>
